--- a/RCourse_20260921.pptx
+++ b/RCourse_20260921.pptx
@@ -15,9 +15,9 @@
     <p:sldId id="260" r:id="rId9"/>
     <p:sldId id="261" r:id="rId10"/>
     <p:sldId id="262" r:id="rId11"/>
-    <p:sldId id="269" r:id="rId18"/>
-    <p:sldId id="263" r:id="rId12"/>
-    <p:sldId id="268" r:id="rId13"/>
+    <p:sldId id="269" r:id="rId12"/>
+    <p:sldId id="263" r:id="rId13"/>
+    <p:sldId id="270" r:id="rId14"/>
   </p:sldIdLst>
   <p:sldSz cx="12192000" cy="6858000"/>
   <p:notesSz cx="6858000" cy="9144000"/>
@@ -116,6 +116,11 @@
       </a:defRPr>
     </a:lvl9pPr>
   </p:defaultTextStyle>
+  <p:extLst>
+    <p:ext uri="{EFAFB233-063F-42B5-8137-9DF3F51BA10A}">
+      <p15:sldGuideLst xmlns:p15="http://schemas.microsoft.com/office/powerpoint/2012/main"/>
+    </p:ext>
+  </p:extLst>
 </p:presentation>
 </file>
 
@@ -268,7 +273,7 @@
           <a:p>
             <a:fld id="{D5AA1C4C-D671-4CDB-B875-AD502002EED0}" type="datetimeFigureOut">
               <a:rPr lang="en-DE" smtClean="0"/>
-              <a:t>29/09/2025</a:t>
+              <a:t>21/09/2026</a:t>
             </a:fld>
             <a:endParaRPr lang="en-DE"/>
           </a:p>
@@ -468,7 +473,7 @@
           <a:p>
             <a:fld id="{D5AA1C4C-D671-4CDB-B875-AD502002EED0}" type="datetimeFigureOut">
               <a:rPr lang="en-DE" smtClean="0"/>
-              <a:t>29/09/2025</a:t>
+              <a:t>21/09/2026</a:t>
             </a:fld>
             <a:endParaRPr lang="en-DE"/>
           </a:p>
@@ -678,7 +683,7 @@
           <a:p>
             <a:fld id="{D5AA1C4C-D671-4CDB-B875-AD502002EED0}" type="datetimeFigureOut">
               <a:rPr lang="en-DE" smtClean="0"/>
-              <a:t>29/09/2025</a:t>
+              <a:t>21/09/2026</a:t>
             </a:fld>
             <a:endParaRPr lang="en-DE"/>
           </a:p>
@@ -878,7 +883,7 @@
           <a:p>
             <a:fld id="{D5AA1C4C-D671-4CDB-B875-AD502002EED0}" type="datetimeFigureOut">
               <a:rPr lang="en-DE" smtClean="0"/>
-              <a:t>29/09/2025</a:t>
+              <a:t>21/09/2026</a:t>
             </a:fld>
             <a:endParaRPr lang="en-DE"/>
           </a:p>
@@ -1154,7 +1159,7 @@
           <a:p>
             <a:fld id="{D5AA1C4C-D671-4CDB-B875-AD502002EED0}" type="datetimeFigureOut">
               <a:rPr lang="en-DE" smtClean="0"/>
-              <a:t>29/09/2025</a:t>
+              <a:t>21/09/2026</a:t>
             </a:fld>
             <a:endParaRPr lang="en-DE"/>
           </a:p>
@@ -1422,7 +1427,7 @@
           <a:p>
             <a:fld id="{D5AA1C4C-D671-4CDB-B875-AD502002EED0}" type="datetimeFigureOut">
               <a:rPr lang="en-DE" smtClean="0"/>
-              <a:t>29/09/2025</a:t>
+              <a:t>21/09/2026</a:t>
             </a:fld>
             <a:endParaRPr lang="en-DE"/>
           </a:p>
@@ -1837,7 +1842,7 @@
           <a:p>
             <a:fld id="{D5AA1C4C-D671-4CDB-B875-AD502002EED0}" type="datetimeFigureOut">
               <a:rPr lang="en-DE" smtClean="0"/>
-              <a:t>29/09/2025</a:t>
+              <a:t>21/09/2026</a:t>
             </a:fld>
             <a:endParaRPr lang="en-DE"/>
           </a:p>
@@ -1979,7 +1984,7 @@
           <a:p>
             <a:fld id="{D5AA1C4C-D671-4CDB-B875-AD502002EED0}" type="datetimeFigureOut">
               <a:rPr lang="en-DE" smtClean="0"/>
-              <a:t>29/09/2025</a:t>
+              <a:t>21/09/2026</a:t>
             </a:fld>
             <a:endParaRPr lang="en-DE"/>
           </a:p>
@@ -2092,7 +2097,7 @@
           <a:p>
             <a:fld id="{D5AA1C4C-D671-4CDB-B875-AD502002EED0}" type="datetimeFigureOut">
               <a:rPr lang="en-DE" smtClean="0"/>
-              <a:t>29/09/2025</a:t>
+              <a:t>21/09/2026</a:t>
             </a:fld>
             <a:endParaRPr lang="en-DE"/>
           </a:p>
@@ -2405,7 +2410,7 @@
           <a:p>
             <a:fld id="{D5AA1C4C-D671-4CDB-B875-AD502002EED0}" type="datetimeFigureOut">
               <a:rPr lang="en-DE" smtClean="0"/>
-              <a:t>29/09/2025</a:t>
+              <a:t>21/09/2026</a:t>
             </a:fld>
             <a:endParaRPr lang="en-DE"/>
           </a:p>
@@ -2694,7 +2699,7 @@
           <a:p>
             <a:fld id="{D5AA1C4C-D671-4CDB-B875-AD502002EED0}" type="datetimeFigureOut">
               <a:rPr lang="en-DE" smtClean="0"/>
-              <a:t>29/09/2025</a:t>
+              <a:t>21/09/2026</a:t>
             </a:fld>
             <a:endParaRPr lang="en-DE"/>
           </a:p>
@@ -2937,7 +2942,7 @@
           <a:p>
             <a:fld id="{D5AA1C4C-D671-4CDB-B875-AD502002EED0}" type="datetimeFigureOut">
               <a:rPr lang="en-DE" smtClean="0"/>
-              <a:t>29/09/2025</a:t>
+              <a:t>21/09/2026</a:t>
             </a:fld>
             <a:endParaRPr lang="en-DE"/>
           </a:p>
@@ -3454,42 +3459,6 @@
           </a:p>
         </p:txBody>
       </p:sp>
-      <p:pic>
-        <p:nvPicPr>
-          <p:cNvPr id="5" name="Picture 4" descr="A qr code on a white background&#10;&#10;AI-generated content may be incorrect.">
-            <a:extLst>
-              <a:ext uri="{FF2B5EF4-FFF2-40B4-BE49-F238E27FC236}">
-                <a16:creationId xmlns:a16="http://schemas.microsoft.com/office/drawing/2014/main" id="{3C4C7C0A-3C18-FFC5-2D75-00DFAD1484C0}"/>
-              </a:ext>
-            </a:extLst>
-          </p:cNvPr>
-          <p:cNvPicPr>
-            <a:picLocks noChangeAspect="1"/>
-          </p:cNvPicPr>
-          <p:nvPr/>
-        </p:nvPicPr>
-        <p:blipFill>
-          <a:blip r:embed="rId3">
-            <a:extLst>
-              <a:ext uri="{28A0092B-C50C-407E-A947-70E740481C1C}">
-                <a14:useLocalDpi xmlns:a14="http://schemas.microsoft.com/office/drawing/2010/main" val="0"/>
-              </a:ext>
-            </a:extLst>
-          </a:blip>
-          <a:stretch>
-            <a:fillRect/>
-          </a:stretch>
-        </p:blipFill>
-        <p:spPr>
-          <a:xfrm>
-            <a:off x="9101599" y="4003932"/>
-            <a:ext cx="2857500" cy="2857500"/>
-          </a:xfrm>
-          <a:prstGeom prst="rect">
-            <a:avLst/>
-          </a:prstGeom>
-        </p:spPr>
-      </p:pic>
       <p:sp>
         <p:nvSpPr>
           <p:cNvPr id="6" name="Subtitle 2">
@@ -3712,14 +3681,53 @@
             <a:pPr algn="r"/>
             <a:r>
               <a:rPr lang="en-US" dirty="0">
-                <a:hlinkClick r:id="rId4"/>
+                <a:hlinkClick r:id="rId3"/>
               </a:rPr>
-              <a:t>https://survey.academiccloud.de/index.php/175875?lang=en</a:t>
-            </a:r>
-            <a:endParaRPr lang="en-US" dirty="0"/>
-          </a:p>
-        </p:txBody>
-      </p:sp>
+              <a:t>https://survey.academiccloud.de/f/618496?lang=en</a:t>
+            </a:r>
+            <a:r>
+              <a:rPr lang="en-US" dirty="0"/>
+              <a:t> </a:t>
+            </a:r>
+          </a:p>
+        </p:txBody>
+      </p:sp>
+      <p:pic>
+        <p:nvPicPr>
+          <p:cNvPr id="7" name="Picture 6">
+            <a:extLst>
+              <a:ext uri="{FF2B5EF4-FFF2-40B4-BE49-F238E27FC236}">
+                <a16:creationId xmlns:a16="http://schemas.microsoft.com/office/drawing/2014/main" id="{3CF2F6D1-BD73-BC3A-225C-31469B56A586}"/>
+              </a:ext>
+            </a:extLst>
+          </p:cNvPr>
+          <p:cNvPicPr>
+            <a:picLocks noChangeAspect="1"/>
+          </p:cNvPicPr>
+          <p:nvPr/>
+        </p:nvPicPr>
+        <p:blipFill>
+          <a:blip r:embed="rId4">
+            <a:extLst>
+              <a:ext uri="{28A0092B-C50C-407E-A947-70E740481C1C}">
+                <a14:useLocalDpi xmlns:a14="http://schemas.microsoft.com/office/drawing/2010/main" val="0"/>
+              </a:ext>
+            </a:extLst>
+          </a:blip>
+          <a:stretch>
+            <a:fillRect/>
+          </a:stretch>
+        </p:blipFill>
+        <p:spPr>
+          <a:xfrm>
+            <a:off x="9330813" y="4002978"/>
+            <a:ext cx="2861187" cy="2766936"/>
+          </a:xfrm>
+          <a:prstGeom prst="rect">
+            <a:avLst/>
+          </a:prstGeom>
+        </p:spPr>
+      </p:pic>
     </p:spTree>
     <p:extLst>
       <p:ext uri="{BB962C8B-B14F-4D97-AF65-F5344CB8AC3E}">
@@ -3851,13 +3859,7 @@
       </p:grpSpPr>
       <p:sp>
         <p:nvSpPr>
-          <p:cNvPr id="2" name="Title 1">
-            <a:extLst>
-              <a:ext uri="{FF2B5EF4-FFF2-40B4-BE49-F238E27FC236}">
-                <a16:creationId xmlns:a16="http://schemas.microsoft.com/office/drawing/2014/main" id="{58D42CC5-97DE-5E41-4D3C-E6658F5A63F0}"/>
-              </a:ext>
-            </a:extLst>
-          </p:cNvPr>
+          <p:cNvPr id="2" name="Title 1"/>
           <p:cNvSpPr>
             <a:spLocks noGrp="1"/>
           </p:cNvSpPr>
@@ -3871,25 +3873,14 @@
           <a:lstStyle/>
           <a:p>
             <a:r>
-              <a:rPr lang="en-US" dirty="0"/>
-              <a:t>Part 8: Wrap-up and Q&amp;A</a:t>
-            </a:r>
-            <a:br>
-              <a:rPr lang="en-US" dirty="0"/>
-            </a:br>
-            <a:endParaRPr lang="en-DE" dirty="0"/>
-          </a:p>
-        </p:txBody>
-      </p:sp>
-      <p:sp>
-        <p:nvSpPr>
-          <p:cNvPr id="3" name="Content Placeholder 2">
-            <a:extLst>
-              <a:ext uri="{FF2B5EF4-FFF2-40B4-BE49-F238E27FC236}">
-                <a16:creationId xmlns:a16="http://schemas.microsoft.com/office/drawing/2014/main" id="{BAACC64E-8723-CAA8-D3A4-A4691CB3BC16}"/>
-              </a:ext>
-            </a:extLst>
-          </p:cNvPr>
+              <a:t>Part 7: Sharing Your Work — Shiny</a:t>
+            </a:r>
+          </a:p>
+        </p:txBody>
+      </p:sp>
+      <p:sp>
+        <p:nvSpPr>
+          <p:cNvPr id="3" name="Content Placeholder 2"/>
           <p:cNvSpPr>
             <a:spLocks noGrp="1"/>
           </p:cNvSpPr>
@@ -3900,65 +3891,87 @@
         <p:spPr/>
         <p:txBody>
           <a:bodyPr>
-            <a:normAutofit/>
+            <a:normAutofit lnSpcReduction="10000"/>
           </a:bodyPr>
           <a:lstStyle/>
           <a:p>
-            <a:pPr/>
-            <a:r>
-              <a:t>Where to go next</a:t>
+            <a:r>
+              <a:rPr dirty="0"/>
+              <a:t>Shiny turns an R script into a small web page</a:t>
             </a:r>
           </a:p>
           <a:p>
             <a:pPr lvl="1"/>
             <a:r>
-              <a:t>R for Data Science, free book — r4ds.hadley.nz</a:t>
+              <a:rPr dirty="0"/>
+              <a:t>Your colleagues click; your code runs in the background</a:t>
+            </a:r>
+          </a:p>
+          <a:p>
+            <a:r>
+              <a:rPr dirty="0"/>
+              <a:t>See one running right now: shiny::</a:t>
+            </a:r>
+            <a:r>
+              <a:rPr dirty="0" err="1"/>
+              <a:t>runExample</a:t>
+            </a:r>
+            <a:r>
+              <a:rPr dirty="0"/>
+              <a:t>("01_hello")</a:t>
             </a:r>
           </a:p>
           <a:p>
             <a:pPr lvl="1"/>
             <a:r>
-              <a:t>Bioconductor, packages for omics — bioconductor.org</a:t>
+              <a:rPr dirty="0"/>
+              <a:t>Ships with the package — nothing to download, ~20 lines of code</a:t>
+            </a:r>
+          </a:p>
+          <a:p>
+            <a:r>
+              <a:rPr dirty="0"/>
+              <a:t>Every app has the same two halves</a:t>
             </a:r>
           </a:p>
           <a:p>
             <a:pPr lvl="1"/>
             <a:r>
-              <a:t>Posit cheatsheets — posit.co/resources/cheatsheets</a:t>
+              <a:rPr dirty="0" err="1"/>
+              <a:t>ui</a:t>
+            </a:r>
+            <a:r>
+              <a:rPr dirty="0"/>
+              <a:t> — what the user sees: dropdowns, sliders, a space for a plot</a:t>
             </a:r>
           </a:p>
           <a:p>
             <a:pPr lvl="1"/>
             <a:r>
-              <a:t>Shiny gallery, with source code — shiny.posit.co/r/gallery</a:t>
-            </a:r>
-          </a:p>
-          <a:p>
-            <a:pPr lvl="1"/>
-            <a:r>
-              <a:t>CRAN task views, packages by topic — cran.r-project.org/web/views</a:t>
-            </a:r>
-          </a:p>
-          <a:p>
-            <a:pPr/>
-            <a:r>
-              <a:t>Everything from today — github.com/douglasadamoski/rcourse</a:t>
-            </a:r>
-          </a:p>
-          <a:p>
-            <a:pPr/>
-            <a:r>
-              <a:t>Questions</a:t>
+              <a:rPr dirty="0"/>
+              <a:t>server — what R does about it: the plotting code we already wrote</a:t>
+            </a:r>
+          </a:p>
+          <a:p>
+            <a:r>
+              <a:rPr dirty="0"/>
+              <a:t>Today's bar plot as an app: a dropdown instead of </a:t>
+            </a:r>
+            <a:r>
+              <a:rPr dirty="0" err="1"/>
+              <a:t>gene_of_interest</a:t>
+            </a:r>
+            <a:endParaRPr dirty="0"/>
+          </a:p>
+          <a:p>
+            <a:r>
+              <a:rPr dirty="0"/>
+              <a:t>Gallery and tutorial — shiny.posit.co</a:t>
             </a:r>
           </a:p>
         </p:txBody>
       </p:sp>
     </p:spTree>
-    <p:extLst>
-      <p:ext uri="{BB962C8B-B14F-4D97-AF65-F5344CB8AC3E}">
-        <p14:creationId xmlns:p14="http://schemas.microsoft.com/office/powerpoint/2010/main" val="4235892978"/>
-      </p:ext>
-    </p:extLst>
   </p:cSld>
   <p:clrMapOvr>
     <a:masterClrMapping/>
@@ -3988,6 +4001,137 @@
           <p:cNvPr id="2" name="Title 1">
             <a:extLst>
               <a:ext uri="{FF2B5EF4-FFF2-40B4-BE49-F238E27FC236}">
+                <a16:creationId xmlns:a16="http://schemas.microsoft.com/office/drawing/2014/main" id="{58D42CC5-97DE-5E41-4D3C-E6658F5A63F0}"/>
+              </a:ext>
+            </a:extLst>
+          </p:cNvPr>
+          <p:cNvSpPr>
+            <a:spLocks noGrp="1"/>
+          </p:cNvSpPr>
+          <p:nvPr>
+            <p:ph type="title"/>
+          </p:nvPr>
+        </p:nvSpPr>
+        <p:spPr/>
+        <p:txBody>
+          <a:bodyPr/>
+          <a:lstStyle/>
+          <a:p>
+            <a:r>
+              <a:rPr lang="en-US" dirty="0"/>
+              <a:t>Part 8: Wrap-up and Q&amp;A</a:t>
+            </a:r>
+            <a:br>
+              <a:rPr lang="en-US" dirty="0"/>
+            </a:br>
+            <a:endParaRPr lang="en-DE" dirty="0"/>
+          </a:p>
+        </p:txBody>
+      </p:sp>
+      <p:sp>
+        <p:nvSpPr>
+          <p:cNvPr id="3" name="Content Placeholder 2">
+            <a:extLst>
+              <a:ext uri="{FF2B5EF4-FFF2-40B4-BE49-F238E27FC236}">
+                <a16:creationId xmlns:a16="http://schemas.microsoft.com/office/drawing/2014/main" id="{BAACC64E-8723-CAA8-D3A4-A4691CB3BC16}"/>
+              </a:ext>
+            </a:extLst>
+          </p:cNvPr>
+          <p:cNvSpPr>
+            <a:spLocks noGrp="1"/>
+          </p:cNvSpPr>
+          <p:nvPr>
+            <p:ph idx="1"/>
+          </p:nvPr>
+        </p:nvSpPr>
+        <p:spPr/>
+        <p:txBody>
+          <a:bodyPr>
+            <a:normAutofit/>
+          </a:bodyPr>
+          <a:lstStyle/>
+          <a:p>
+            <a:r>
+              <a:t>Where to go next</a:t>
+            </a:r>
+          </a:p>
+          <a:p>
+            <a:pPr lvl="1"/>
+            <a:r>
+              <a:t>R for Data Science, free book — r4ds.hadley.nz</a:t>
+            </a:r>
+          </a:p>
+          <a:p>
+            <a:pPr lvl="1"/>
+            <a:r>
+              <a:t>Bioconductor, packages for omics — bioconductor.org</a:t>
+            </a:r>
+          </a:p>
+          <a:p>
+            <a:pPr lvl="1"/>
+            <a:r>
+              <a:t>Posit cheatsheets — posit.co/resources/cheatsheets</a:t>
+            </a:r>
+          </a:p>
+          <a:p>
+            <a:pPr lvl="1"/>
+            <a:r>
+              <a:t>Shiny gallery, with source code — shiny.posit.co/r/gallery</a:t>
+            </a:r>
+          </a:p>
+          <a:p>
+            <a:pPr lvl="1"/>
+            <a:r>
+              <a:t>CRAN task views, packages by topic — cran.r-project.org/web/views</a:t>
+            </a:r>
+          </a:p>
+          <a:p>
+            <a:r>
+              <a:t>Everything from today — github.com/douglasadamoski/rcourse</a:t>
+            </a:r>
+          </a:p>
+          <a:p>
+            <a:r>
+              <a:t>Questions</a:t>
+            </a:r>
+          </a:p>
+        </p:txBody>
+      </p:sp>
+    </p:spTree>
+    <p:extLst>
+      <p:ext uri="{BB962C8B-B14F-4D97-AF65-F5344CB8AC3E}">
+        <p14:creationId xmlns:p14="http://schemas.microsoft.com/office/powerpoint/2010/main" val="4235892978"/>
+      </p:ext>
+    </p:extLst>
+  </p:cSld>
+  <p:clrMapOvr>
+    <a:masterClrMapping/>
+  </p:clrMapOvr>
+</p:sld>
+</file>
+
+<file path=ppt/slides/slide13.xml><?xml version="1.0" encoding="utf-8"?>
+<p:sld xmlns:a="http://schemas.openxmlformats.org/drawingml/2006/main" xmlns:r="http://schemas.openxmlformats.org/officeDocument/2006/relationships" xmlns:p="http://schemas.openxmlformats.org/presentationml/2006/main">
+  <p:cSld>
+    <p:spTree>
+      <p:nvGrpSpPr>
+        <p:cNvPr id="1" name=""/>
+        <p:cNvGrpSpPr/>
+        <p:nvPr/>
+      </p:nvGrpSpPr>
+      <p:grpSpPr>
+        <a:xfrm>
+          <a:off x="0" y="0"/>
+          <a:ext cx="0" cy="0"/>
+          <a:chOff x="0" y="0"/>
+          <a:chExt cx="0" cy="0"/>
+        </a:xfrm>
+      </p:grpSpPr>
+      <p:sp>
+        <p:nvSpPr>
+          <p:cNvPr id="2" name="Title 1">
+            <a:extLst>
+              <a:ext uri="{FF2B5EF4-FFF2-40B4-BE49-F238E27FC236}">
                 <a16:creationId xmlns:a16="http://schemas.microsoft.com/office/drawing/2014/main" id="{FC9F5E03-676B-05E6-6DDB-5A59230DDBAD}"/>
               </a:ext>
             </a:extLst>
@@ -4052,53 +4196,37 @@
           </a:xfrm>
         </p:spPr>
         <p:txBody>
-          <a:bodyPr/>
+          <a:bodyPr>
+            <a:normAutofit lnSpcReduction="10000"/>
+          </a:bodyPr>
           <a:lstStyle/>
           <a:p>
             <a:r>
               <a:rPr lang="de-DE" dirty="0"/>
               <a:t>Douglas Adamoski Meira – 21.09.2026</a:t>
             </a:r>
+          </a:p>
+          <a:p>
+            <a:endParaRPr lang="de-DE" dirty="0"/>
+          </a:p>
+          <a:p>
+            <a:endParaRPr lang="de-DE" dirty="0"/>
+          </a:p>
+          <a:p>
+            <a:r>
+              <a:rPr lang="en-US" dirty="0">
+                <a:hlinkClick r:id="rId2"/>
+              </a:rPr>
+              <a:t>https://github.com/douglasadamoski/rcourse/</a:t>
+            </a:r>
+            <a:r>
+              <a:rPr lang="en-US" dirty="0"/>
+              <a:t> </a:t>
+            </a:r>
             <a:endParaRPr lang="en-DE" dirty="0"/>
           </a:p>
         </p:txBody>
       </p:sp>
-      <p:pic>
-        <p:nvPicPr>
-          <p:cNvPr id="5" name="Picture 4" descr="A qr code on a white background&#10;&#10;AI-generated content may be incorrect.">
-            <a:extLst>
-              <a:ext uri="{FF2B5EF4-FFF2-40B4-BE49-F238E27FC236}">
-                <a16:creationId xmlns:a16="http://schemas.microsoft.com/office/drawing/2014/main" id="{3C4C7C0A-3C18-FFC5-2D75-00DFAD1484C0}"/>
-              </a:ext>
-            </a:extLst>
-          </p:cNvPr>
-          <p:cNvPicPr>
-            <a:picLocks noChangeAspect="1"/>
-          </p:cNvPicPr>
-          <p:nvPr/>
-        </p:nvPicPr>
-        <p:blipFill>
-          <a:blip r:embed="rId2">
-            <a:extLst>
-              <a:ext uri="{28A0092B-C50C-407E-A947-70E740481C1C}">
-                <a14:useLocalDpi xmlns:a14="http://schemas.microsoft.com/office/drawing/2010/main" val="0"/>
-              </a:ext>
-            </a:extLst>
-          </a:blip>
-          <a:stretch>
-            <a:fillRect/>
-          </a:stretch>
-        </p:blipFill>
-        <p:spPr>
-          <a:xfrm>
-            <a:off x="9101599" y="4003932"/>
-            <a:ext cx="2857500" cy="2857500"/>
-          </a:xfrm>
-          <a:prstGeom prst="rect">
-            <a:avLst/>
-          </a:prstGeom>
-        </p:spPr>
-      </p:pic>
       <p:sp>
         <p:nvSpPr>
           <p:cNvPr id="6" name="Subtitle 2">
@@ -4323,127 +4451,57 @@
               <a:rPr lang="en-US" dirty="0">
                 <a:hlinkClick r:id="rId3"/>
               </a:rPr>
-              <a:t>https://survey.academiccloud.de/index.php/175875?lang=en</a:t>
-            </a:r>
-            <a:endParaRPr lang="en-US" dirty="0"/>
-          </a:p>
-        </p:txBody>
-      </p:sp>
+              <a:t>https://survey.academiccloud.de/f/618496?lang=en</a:t>
+            </a:r>
+            <a:r>
+              <a:rPr lang="en-US" dirty="0"/>
+              <a:t> </a:t>
+            </a:r>
+          </a:p>
+        </p:txBody>
+      </p:sp>
+      <p:pic>
+        <p:nvPicPr>
+          <p:cNvPr id="7" name="Picture 6">
+            <a:extLst>
+              <a:ext uri="{FF2B5EF4-FFF2-40B4-BE49-F238E27FC236}">
+                <a16:creationId xmlns:a16="http://schemas.microsoft.com/office/drawing/2014/main" id="{3CF2F6D1-BD73-BC3A-225C-31469B56A586}"/>
+              </a:ext>
+            </a:extLst>
+          </p:cNvPr>
+          <p:cNvPicPr>
+            <a:picLocks noChangeAspect="1"/>
+          </p:cNvPicPr>
+          <p:nvPr/>
+        </p:nvPicPr>
+        <p:blipFill>
+          <a:blip r:embed="rId4">
+            <a:extLst>
+              <a:ext uri="{28A0092B-C50C-407E-A947-70E740481C1C}">
+                <a14:useLocalDpi xmlns:a14="http://schemas.microsoft.com/office/drawing/2010/main" val="0"/>
+              </a:ext>
+            </a:extLst>
+          </a:blip>
+          <a:stretch>
+            <a:fillRect/>
+          </a:stretch>
+        </p:blipFill>
+        <p:spPr>
+          <a:xfrm>
+            <a:off x="9330813" y="4002978"/>
+            <a:ext cx="2861187" cy="2766936"/>
+          </a:xfrm>
+          <a:prstGeom prst="rect">
+            <a:avLst/>
+          </a:prstGeom>
+        </p:spPr>
+      </p:pic>
     </p:spTree>
     <p:extLst>
       <p:ext uri="{BB962C8B-B14F-4D97-AF65-F5344CB8AC3E}">
-        <p14:creationId xmlns:p14="http://schemas.microsoft.com/office/powerpoint/2010/main" val="1393455725"/>
+        <p14:creationId xmlns:p14="http://schemas.microsoft.com/office/powerpoint/2010/main" val="4187468831"/>
       </p:ext>
     </p:extLst>
-  </p:cSld>
-  <p:clrMapOvr>
-    <a:masterClrMapping/>
-  </p:clrMapOvr>
-</p:sld>
-</file>
-
-<file path=ppt/slides/slide13.xml><?xml version="1.0" encoding="utf-8"?>
-<p:sld xmlns:a="http://schemas.openxmlformats.org/drawingml/2006/main" xmlns:p="http://schemas.openxmlformats.org/presentationml/2006/main" xmlns:r="http://schemas.openxmlformats.org/officeDocument/2006/relationships">
-  <p:cSld>
-    <p:spTree>
-      <p:nvGrpSpPr>
-        <p:cNvPr id="1" name=""/>
-        <p:cNvGrpSpPr/>
-        <p:nvPr/>
-      </p:nvGrpSpPr>
-      <p:grpSpPr/>
-      <p:sp>
-        <p:nvSpPr>
-          <p:cNvPr id="2" name="Title 1"/>
-          <p:cNvSpPr>
-            <a:spLocks noGrp="1"/>
-          </p:cNvSpPr>
-          <p:nvPr>
-            <p:ph type="title"/>
-          </p:nvPr>
-        </p:nvSpPr>
-        <p:spPr/>
-        <p:txBody>
-          <a:bodyPr/>
-          <a:lstStyle/>
-          <a:p>
-            <a:r>
-              <a:t>Part 7: Sharing Your Work — Shiny</a:t>
-            </a:r>
-          </a:p>
-        </p:txBody>
-      </p:sp>
-      <p:sp>
-        <p:nvSpPr>
-          <p:cNvPr id="3" name="Content Placeholder 2"/>
-          <p:cNvSpPr>
-            <a:spLocks noGrp="1"/>
-          </p:cNvSpPr>
-          <p:nvPr>
-            <p:ph idx="1"/>
-          </p:nvPr>
-        </p:nvSpPr>
-        <p:spPr/>
-        <p:txBody>
-          <a:bodyPr/>
-          <a:lstStyle/>
-          <a:p>
-            <a:pPr/>
-            <a:r>
-              <a:t>Shiny turns an R script into a small web page</a:t>
-            </a:r>
-          </a:p>
-          <a:p>
-            <a:pPr lvl="1"/>
-            <a:r>
-              <a:t>Your colleagues click; your code runs in the background</a:t>
-            </a:r>
-          </a:p>
-          <a:p>
-            <a:pPr/>
-            <a:r>
-              <a:t>See one running right now: shiny::runExample("01_hello")</a:t>
-            </a:r>
-          </a:p>
-          <a:p>
-            <a:pPr lvl="1"/>
-            <a:r>
-              <a:t>Ships with the package — nothing to download, ~20 lines of code</a:t>
-            </a:r>
-          </a:p>
-          <a:p>
-            <a:pPr/>
-            <a:r>
-              <a:t>Every app has the same two halves</a:t>
-            </a:r>
-          </a:p>
-          <a:p>
-            <a:pPr lvl="1"/>
-            <a:r>
-              <a:t>ui — what the user sees: dropdowns, sliders, a space for a plot</a:t>
-            </a:r>
-          </a:p>
-          <a:p>
-            <a:pPr lvl="1"/>
-            <a:r>
-              <a:t>server — what R does about it: the plotting code we already wrote</a:t>
-            </a:r>
-          </a:p>
-          <a:p>
-            <a:pPr/>
-            <a:r>
-              <a:t>Today's bar plot as an app: a dropdown instead of gene_of_interest</a:t>
-            </a:r>
-          </a:p>
-          <a:p>
-            <a:pPr/>
-            <a:r>
-              <a:t>Gallery and tutorial — shiny.posit.co</a:t>
-            </a:r>
-          </a:p>
-        </p:txBody>
-      </p:sp>
-    </p:spTree>
   </p:cSld>
   <p:clrMapOvr>
     <a:masterClrMapping/>
